--- a/tests/OfficeAgent.Tests/Corpus/v1.0.0/native/inputs/p-insertchart.pptx
+++ b/tests/OfficeAgent.Tests/Corpus/v1.0.0/native/inputs/p-insertchart.pptx
@@ -2,10 +2,10 @@
 <file path=ppt/presentation.xml><?xml version="1.0" encoding="utf-8"?>
 <p:presentation xmlns:p="http://schemas.openxmlformats.org/presentationml/2006/main">
   <p:sldMasterIdLst>
-    <p:sldMasterId xmlns:r="http://schemas.openxmlformats.org/officeDocument/2006/relationships" id="2147483648" r:id="Rbfeb4bd45e264429"/>
+    <p:sldMasterId xmlns:r="http://schemas.openxmlformats.org/officeDocument/2006/relationships" id="2147483648" r:id="R409187b804a643a8"/>
   </p:sldMasterIdLst>
   <p:sldIdLst>
-    <p:sldId xmlns:r="http://schemas.openxmlformats.org/officeDocument/2006/relationships" id="256" r:id="Rad09327f5d7f4740"/>
+    <p:sldId xmlns:r="http://schemas.openxmlformats.org/officeDocument/2006/relationships" id="256" r:id="Rf4bdfa78a68f4f0e"/>
   </p:sldIdLst>
   <p:sldSz cx="12192000" cy="6858000"/>
   <p:notesSz cx="6858000" cy="9144000"/>
@@ -386,11 +386,11 @@
   </p:cSld>
   <p:clrMap bg1="lt1" tx1="dk1" bg2="lt2" tx2="dk2" accent1="accent1" accent2="accent2" accent3="accent3" accent4="accent4" accent5="accent5" accent6="accent6" hlink="hlink" folHlink="folHlink"/>
   <p:sldLayoutIdLst>
-    <p:sldLayoutId xmlns:r="http://schemas.openxmlformats.org/officeDocument/2006/relationships" id="2147483649" r:id="R8e086551ee804c02"/>
-    <p:sldLayoutId xmlns:r="http://schemas.openxmlformats.org/officeDocument/2006/relationships" id="2147483650" r:id="R3b3108f721d74404"/>
-    <p:sldLayoutId xmlns:r="http://schemas.openxmlformats.org/officeDocument/2006/relationships" id="2147483651" r:id="R7957149120f540d0"/>
-    <p:sldLayoutId xmlns:r="http://schemas.openxmlformats.org/officeDocument/2006/relationships" id="2147483652" r:id="R63db8aa471f149e6"/>
-    <p:sldLayoutId xmlns:r="http://schemas.openxmlformats.org/officeDocument/2006/relationships" id="2147483653" r:id="R0c83a856ad3e44c6"/>
+    <p:sldLayoutId xmlns:r="http://schemas.openxmlformats.org/officeDocument/2006/relationships" id="2147483649" r:id="R4c991007515b4b9e"/>
+    <p:sldLayoutId xmlns:r="http://schemas.openxmlformats.org/officeDocument/2006/relationships" id="2147483650" r:id="R9c19628d00e3416f"/>
+    <p:sldLayoutId xmlns:r="http://schemas.openxmlformats.org/officeDocument/2006/relationships" id="2147483651" r:id="R01b9ef169eb34c46"/>
+    <p:sldLayoutId xmlns:r="http://schemas.openxmlformats.org/officeDocument/2006/relationships" id="2147483652" r:id="R48b99798ec67439e"/>
+    <p:sldLayoutId xmlns:r="http://schemas.openxmlformats.org/officeDocument/2006/relationships" id="2147483653" r:id="Rdcfa6fd50ce64474"/>
   </p:sldLayoutIdLst>
 </p:sldMaster>
 </file>

--- a/tests/OfficeAgent.Tests/Corpus/v1.0.0/native/inputs/p-insertchart.pptx
+++ b/tests/OfficeAgent.Tests/Corpus/v1.0.0/native/inputs/p-insertchart.pptx
@@ -2,10 +2,10 @@
 <file path=ppt/presentation.xml><?xml version="1.0" encoding="utf-8"?>
 <p:presentation xmlns:p="http://schemas.openxmlformats.org/presentationml/2006/main">
   <p:sldMasterIdLst>
-    <p:sldMasterId xmlns:r="http://schemas.openxmlformats.org/officeDocument/2006/relationships" id="2147483648" r:id="R409187b804a643a8"/>
+    <p:sldMasterId xmlns:r="http://schemas.openxmlformats.org/officeDocument/2006/relationships" id="2147483648" r:id="Rdb41cd9266d3476e"/>
   </p:sldMasterIdLst>
   <p:sldIdLst>
-    <p:sldId xmlns:r="http://schemas.openxmlformats.org/officeDocument/2006/relationships" id="256" r:id="Rf4bdfa78a68f4f0e"/>
+    <p:sldId xmlns:r="http://schemas.openxmlformats.org/officeDocument/2006/relationships" id="256" r:id="R959758bd0adf4dbf"/>
   </p:sldIdLst>
   <p:sldSz cx="12192000" cy="6858000"/>
   <p:notesSz cx="6858000" cy="9144000"/>
@@ -386,11 +386,11 @@
   </p:cSld>
   <p:clrMap bg1="lt1" tx1="dk1" bg2="lt2" tx2="dk2" accent1="accent1" accent2="accent2" accent3="accent3" accent4="accent4" accent5="accent5" accent6="accent6" hlink="hlink" folHlink="folHlink"/>
   <p:sldLayoutIdLst>
-    <p:sldLayoutId xmlns:r="http://schemas.openxmlformats.org/officeDocument/2006/relationships" id="2147483649" r:id="R4c991007515b4b9e"/>
-    <p:sldLayoutId xmlns:r="http://schemas.openxmlformats.org/officeDocument/2006/relationships" id="2147483650" r:id="R9c19628d00e3416f"/>
-    <p:sldLayoutId xmlns:r="http://schemas.openxmlformats.org/officeDocument/2006/relationships" id="2147483651" r:id="R01b9ef169eb34c46"/>
-    <p:sldLayoutId xmlns:r="http://schemas.openxmlformats.org/officeDocument/2006/relationships" id="2147483652" r:id="R48b99798ec67439e"/>
-    <p:sldLayoutId xmlns:r="http://schemas.openxmlformats.org/officeDocument/2006/relationships" id="2147483653" r:id="Rdcfa6fd50ce64474"/>
+    <p:sldLayoutId xmlns:r="http://schemas.openxmlformats.org/officeDocument/2006/relationships" id="2147483649" r:id="Rd938635528264d31"/>
+    <p:sldLayoutId xmlns:r="http://schemas.openxmlformats.org/officeDocument/2006/relationships" id="2147483650" r:id="R843d971a4a9c4848"/>
+    <p:sldLayoutId xmlns:r="http://schemas.openxmlformats.org/officeDocument/2006/relationships" id="2147483651" r:id="R31ef0db96d454662"/>
+    <p:sldLayoutId xmlns:r="http://schemas.openxmlformats.org/officeDocument/2006/relationships" id="2147483652" r:id="R5ef1f6ddac7b45cc"/>
+    <p:sldLayoutId xmlns:r="http://schemas.openxmlformats.org/officeDocument/2006/relationships" id="2147483653" r:id="R4365c08e89db4df3"/>
   </p:sldLayoutIdLst>
 </p:sldMaster>
 </file>

--- a/tests/OfficeAgent.Tests/Corpus/v1.0.0/native/inputs/p-insertchart.pptx
+++ b/tests/OfficeAgent.Tests/Corpus/v1.0.0/native/inputs/p-insertchart.pptx
@@ -2,10 +2,10 @@
 <file path=ppt/presentation.xml><?xml version="1.0" encoding="utf-8"?>
 <p:presentation xmlns:p="http://schemas.openxmlformats.org/presentationml/2006/main">
   <p:sldMasterIdLst>
-    <p:sldMasterId xmlns:r="http://schemas.openxmlformats.org/officeDocument/2006/relationships" id="2147483648" r:id="Rdb41cd9266d3476e"/>
+    <p:sldMasterId xmlns:r="http://schemas.openxmlformats.org/officeDocument/2006/relationships" id="2147483648" r:id="Ra58eafb216ad4de3"/>
   </p:sldMasterIdLst>
   <p:sldIdLst>
-    <p:sldId xmlns:r="http://schemas.openxmlformats.org/officeDocument/2006/relationships" id="256" r:id="R959758bd0adf4dbf"/>
+    <p:sldId xmlns:r="http://schemas.openxmlformats.org/officeDocument/2006/relationships" id="256" r:id="Reefb959e1a844ead"/>
   </p:sldIdLst>
   <p:sldSz cx="12192000" cy="6858000"/>
   <p:notesSz cx="6858000" cy="9144000"/>
@@ -386,11 +386,11 @@
   </p:cSld>
   <p:clrMap bg1="lt1" tx1="dk1" bg2="lt2" tx2="dk2" accent1="accent1" accent2="accent2" accent3="accent3" accent4="accent4" accent5="accent5" accent6="accent6" hlink="hlink" folHlink="folHlink"/>
   <p:sldLayoutIdLst>
-    <p:sldLayoutId xmlns:r="http://schemas.openxmlformats.org/officeDocument/2006/relationships" id="2147483649" r:id="Rd938635528264d31"/>
-    <p:sldLayoutId xmlns:r="http://schemas.openxmlformats.org/officeDocument/2006/relationships" id="2147483650" r:id="R843d971a4a9c4848"/>
-    <p:sldLayoutId xmlns:r="http://schemas.openxmlformats.org/officeDocument/2006/relationships" id="2147483651" r:id="R31ef0db96d454662"/>
-    <p:sldLayoutId xmlns:r="http://schemas.openxmlformats.org/officeDocument/2006/relationships" id="2147483652" r:id="R5ef1f6ddac7b45cc"/>
-    <p:sldLayoutId xmlns:r="http://schemas.openxmlformats.org/officeDocument/2006/relationships" id="2147483653" r:id="R4365c08e89db4df3"/>
+    <p:sldLayoutId xmlns:r="http://schemas.openxmlformats.org/officeDocument/2006/relationships" id="2147483649" r:id="Rb334d4f0488e45b9"/>
+    <p:sldLayoutId xmlns:r="http://schemas.openxmlformats.org/officeDocument/2006/relationships" id="2147483650" r:id="R986d5a9bf25c4a0d"/>
+    <p:sldLayoutId xmlns:r="http://schemas.openxmlformats.org/officeDocument/2006/relationships" id="2147483651" r:id="Rbb5b20530f6a483f"/>
+    <p:sldLayoutId xmlns:r="http://schemas.openxmlformats.org/officeDocument/2006/relationships" id="2147483652" r:id="Rbeddb55e575b49e8"/>
+    <p:sldLayoutId xmlns:r="http://schemas.openxmlformats.org/officeDocument/2006/relationships" id="2147483653" r:id="R002fa5e4178d4cec"/>
   </p:sldLayoutIdLst>
 </p:sldMaster>
 </file>

--- a/tests/OfficeAgent.Tests/Corpus/v1.0.0/native/inputs/p-insertchart.pptx
+++ b/tests/OfficeAgent.Tests/Corpus/v1.0.0/native/inputs/p-insertchart.pptx
@@ -2,10 +2,10 @@
 <file path=ppt/presentation.xml><?xml version="1.0" encoding="utf-8"?>
 <p:presentation xmlns:p="http://schemas.openxmlformats.org/presentationml/2006/main">
   <p:sldMasterIdLst>
-    <p:sldMasterId xmlns:r="http://schemas.openxmlformats.org/officeDocument/2006/relationships" id="2147483648" r:id="Ra58eafb216ad4de3"/>
+    <p:sldMasterId xmlns:r="http://schemas.openxmlformats.org/officeDocument/2006/relationships" id="2147483648" r:id="R76c6b8c5af574f12"/>
   </p:sldMasterIdLst>
   <p:sldIdLst>
-    <p:sldId xmlns:r="http://schemas.openxmlformats.org/officeDocument/2006/relationships" id="256" r:id="Reefb959e1a844ead"/>
+    <p:sldId xmlns:r="http://schemas.openxmlformats.org/officeDocument/2006/relationships" id="256" r:id="Rc788c781714b4f7d"/>
   </p:sldIdLst>
   <p:sldSz cx="12192000" cy="6858000"/>
   <p:notesSz cx="6858000" cy="9144000"/>
@@ -386,11 +386,11 @@
   </p:cSld>
   <p:clrMap bg1="lt1" tx1="dk1" bg2="lt2" tx2="dk2" accent1="accent1" accent2="accent2" accent3="accent3" accent4="accent4" accent5="accent5" accent6="accent6" hlink="hlink" folHlink="folHlink"/>
   <p:sldLayoutIdLst>
-    <p:sldLayoutId xmlns:r="http://schemas.openxmlformats.org/officeDocument/2006/relationships" id="2147483649" r:id="Rb334d4f0488e45b9"/>
-    <p:sldLayoutId xmlns:r="http://schemas.openxmlformats.org/officeDocument/2006/relationships" id="2147483650" r:id="R986d5a9bf25c4a0d"/>
-    <p:sldLayoutId xmlns:r="http://schemas.openxmlformats.org/officeDocument/2006/relationships" id="2147483651" r:id="Rbb5b20530f6a483f"/>
-    <p:sldLayoutId xmlns:r="http://schemas.openxmlformats.org/officeDocument/2006/relationships" id="2147483652" r:id="Rbeddb55e575b49e8"/>
-    <p:sldLayoutId xmlns:r="http://schemas.openxmlformats.org/officeDocument/2006/relationships" id="2147483653" r:id="R002fa5e4178d4cec"/>
+    <p:sldLayoutId xmlns:r="http://schemas.openxmlformats.org/officeDocument/2006/relationships" id="2147483649" r:id="Rf86fb31046f14e55"/>
+    <p:sldLayoutId xmlns:r="http://schemas.openxmlformats.org/officeDocument/2006/relationships" id="2147483650" r:id="R27c2286095f24bc3"/>
+    <p:sldLayoutId xmlns:r="http://schemas.openxmlformats.org/officeDocument/2006/relationships" id="2147483651" r:id="Redb6e645feef4bbb"/>
+    <p:sldLayoutId xmlns:r="http://schemas.openxmlformats.org/officeDocument/2006/relationships" id="2147483652" r:id="R6f64c5c3d4bd4164"/>
+    <p:sldLayoutId xmlns:r="http://schemas.openxmlformats.org/officeDocument/2006/relationships" id="2147483653" r:id="Ra8b29503a4424882"/>
   </p:sldLayoutIdLst>
 </p:sldMaster>
 </file>

--- a/tests/OfficeAgent.Tests/Corpus/v1.0.0/native/inputs/p-insertchart.pptx
+++ b/tests/OfficeAgent.Tests/Corpus/v1.0.0/native/inputs/p-insertchart.pptx
@@ -2,10 +2,10 @@
 <file path=ppt/presentation.xml><?xml version="1.0" encoding="utf-8"?>
 <p:presentation xmlns:p="http://schemas.openxmlformats.org/presentationml/2006/main">
   <p:sldMasterIdLst>
-    <p:sldMasterId xmlns:r="http://schemas.openxmlformats.org/officeDocument/2006/relationships" id="2147483648" r:id="R76c6b8c5af574f12"/>
+    <p:sldMasterId xmlns:r="http://schemas.openxmlformats.org/officeDocument/2006/relationships" id="2147483648" r:id="Rfba620732baa4e64"/>
   </p:sldMasterIdLst>
   <p:sldIdLst>
-    <p:sldId xmlns:r="http://schemas.openxmlformats.org/officeDocument/2006/relationships" id="256" r:id="Rc788c781714b4f7d"/>
+    <p:sldId xmlns:r="http://schemas.openxmlformats.org/officeDocument/2006/relationships" id="256" r:id="Rdac63005d32944fb"/>
   </p:sldIdLst>
   <p:sldSz cx="12192000" cy="6858000"/>
   <p:notesSz cx="6858000" cy="9144000"/>
@@ -386,11 +386,11 @@
   </p:cSld>
   <p:clrMap bg1="lt1" tx1="dk1" bg2="lt2" tx2="dk2" accent1="accent1" accent2="accent2" accent3="accent3" accent4="accent4" accent5="accent5" accent6="accent6" hlink="hlink" folHlink="folHlink"/>
   <p:sldLayoutIdLst>
-    <p:sldLayoutId xmlns:r="http://schemas.openxmlformats.org/officeDocument/2006/relationships" id="2147483649" r:id="Rf86fb31046f14e55"/>
-    <p:sldLayoutId xmlns:r="http://schemas.openxmlformats.org/officeDocument/2006/relationships" id="2147483650" r:id="R27c2286095f24bc3"/>
-    <p:sldLayoutId xmlns:r="http://schemas.openxmlformats.org/officeDocument/2006/relationships" id="2147483651" r:id="Redb6e645feef4bbb"/>
-    <p:sldLayoutId xmlns:r="http://schemas.openxmlformats.org/officeDocument/2006/relationships" id="2147483652" r:id="R6f64c5c3d4bd4164"/>
-    <p:sldLayoutId xmlns:r="http://schemas.openxmlformats.org/officeDocument/2006/relationships" id="2147483653" r:id="Ra8b29503a4424882"/>
+    <p:sldLayoutId xmlns:r="http://schemas.openxmlformats.org/officeDocument/2006/relationships" id="2147483649" r:id="R830de01b12ee4219"/>
+    <p:sldLayoutId xmlns:r="http://schemas.openxmlformats.org/officeDocument/2006/relationships" id="2147483650" r:id="R04c952b5551b41d8"/>
+    <p:sldLayoutId xmlns:r="http://schemas.openxmlformats.org/officeDocument/2006/relationships" id="2147483651" r:id="R92301ec0d9124a06"/>
+    <p:sldLayoutId xmlns:r="http://schemas.openxmlformats.org/officeDocument/2006/relationships" id="2147483652" r:id="R42df46698eae4edb"/>
+    <p:sldLayoutId xmlns:r="http://schemas.openxmlformats.org/officeDocument/2006/relationships" id="2147483653" r:id="Racc6a8aea64e49eb"/>
   </p:sldLayoutIdLst>
 </p:sldMaster>
 </file>
